--- a/CHAPTER 5 Cognitive Architectures with LangGraph.pptx
+++ b/CHAPTER 5 Cognitive Architectures with LangGraph.pptx
@@ -3220,6 +3220,11 @@
           <a:prstGeom prst="rect">
             <a:avLst/>
           </a:prstGeom>
+          <a:ln>
+            <a:solidFill>
+              <a:schemeClr val="tx1"/>
+            </a:solidFill>
+          </a:ln>
         </p:spPr>
       </p:pic>
       <p:sp>
@@ -3504,6 +3509,11 @@
           <a:prstGeom prst="rect">
             <a:avLst/>
           </a:prstGeom>
+          <a:ln>
+            <a:solidFill>
+              <a:schemeClr val="tx1"/>
+            </a:solidFill>
+          </a:ln>
         </p:spPr>
       </p:pic>
       <p:sp>
@@ -3654,6 +3664,11 @@
             <a:avLst/>
           </a:prstGeom>
           <a:noFill/>
+          <a:ln>
+            <a:solidFill>
+              <a:schemeClr val="tx1"/>
+            </a:solidFill>
+          </a:ln>
         </p:spPr>
         <p:txBody>
           <a:bodyPr wrap="square">
@@ -8807,6 +8822,11 @@
           <a:prstGeom prst="rect">
             <a:avLst/>
           </a:prstGeom>
+          <a:ln>
+            <a:solidFill>
+              <a:schemeClr val="tx1"/>
+            </a:solidFill>
+          </a:ln>
         </p:spPr>
       </p:pic>
       <p:sp>
